--- a/presentation/slides.pptx
+++ b/presentation/slides.pptx
@@ -19,6 +19,7 @@
     <p:sldId id="267" r:id="rId18"/>
     <p:sldId id="268" r:id="rId19"/>
     <p:sldId id="269" r:id="rId20"/>
+    <p:sldId id="270" r:id="rId21"/>
   </p:sldIdLst>
   <p:sldSz cx="12191695" cy="6858000" type="screen4x3"/>
   <p:notesSz cx="6858000" cy="9144000"/>
@@ -3314,7 +3315,7 @@
                 </a:solidFill>
                 <a:latin typeface="IBM Plex Mono"/>
               </a:rPr>
-              <a:t>01 / 14</a:t>
+              <a:t>01 / 15</a:t>
             </a:r>
           </a:p>
         </p:txBody>
@@ -3703,7 +3704,7 @@
                 </a:solidFill>
                 <a:latin typeface="IBM Plex Mono"/>
               </a:rPr>
-              <a:t>10 / 14</a:t>
+              <a:t>10 / 15</a:t>
             </a:r>
           </a:p>
         </p:txBody>
@@ -4065,7 +4066,7 @@
                 </a:solidFill>
                 <a:latin typeface="IBM Plex Mono"/>
               </a:rPr>
-              <a:t>11 / 14</a:t>
+              <a:t>11 / 15</a:t>
             </a:r>
           </a:p>
         </p:txBody>
@@ -4402,7 +4403,7 @@
                 </a:solidFill>
                 <a:latin typeface="IBM Plex Mono"/>
               </a:rPr>
-              <a:t>12 / 14</a:t>
+              <a:t>12 / 15</a:t>
             </a:r>
           </a:p>
         </p:txBody>
@@ -5202,7 +5203,7 @@
                 </a:solidFill>
                 <a:latin typeface="IBM Plex Mono"/>
               </a:rPr>
-              <a:t>13 / 14</a:t>
+              <a:t>13 / 15</a:t>
             </a:r>
           </a:p>
         </p:txBody>
@@ -6042,7 +6043,729 @@
                 </a:solidFill>
                 <a:latin typeface="IBM Plex Mono"/>
               </a:rPr>
-              <a:t>14 / 14</a:t>
+              <a:t>14 / 15</a:t>
+            </a:r>
+          </a:p>
+        </p:txBody>
+      </p:sp>
+    </p:spTree>
+  </p:cSld>
+  <p:clrMapOvr>
+    <a:masterClrMapping/>
+  </p:clrMapOvr>
+</p:sld>
+</file>
+
+<file path=ppt/slides/slide15.xml><?xml version="1.0" encoding="utf-8"?>
+<p:sld xmlns:a="http://schemas.openxmlformats.org/drawingml/2006/main" xmlns:p="http://schemas.openxmlformats.org/presentationml/2006/main" xmlns:r="http://schemas.openxmlformats.org/officeDocument/2006/relationships">
+  <p:cSld>
+    <p:bg>
+      <p:bgPr>
+        <a:solidFill>
+          <a:srgbClr val="ECEFE2"/>
+        </a:solidFill>
+        <a:effectLst/>
+      </p:bgPr>
+    </p:bg>
+    <p:spTree>
+      <p:nvGrpSpPr>
+        <p:cNvPr id="1" name=""/>
+        <p:cNvGrpSpPr/>
+        <p:nvPr/>
+      </p:nvGrpSpPr>
+      <p:grpSpPr/>
+      <p:sp>
+        <p:nvSpPr>
+          <p:cNvPr id="2" name="TextBox 1"/>
+          <p:cNvSpPr txBox="1"/>
+          <p:nvPr/>
+        </p:nvSpPr>
+        <p:spPr>
+          <a:xfrm>
+            <a:off x="1097280" y="411480"/>
+            <a:ext cx="9144000" cy="365760"/>
+          </a:xfrm>
+          <a:prstGeom prst="rect">
+            <a:avLst/>
+          </a:prstGeom>
+          <a:noFill/>
+        </p:spPr>
+        <p:txBody>
+          <a:bodyPr wrap="none">
+            <a:spAutoFit/>
+          </a:bodyPr>
+          <a:lstStyle/>
+          <a:p>
+            <a:r>
+              <a:rPr sz="1100" b="1" i="0">
+                <a:solidFill>
+                  <a:srgbClr val="1F5E56"/>
+                </a:solidFill>
+                <a:latin typeface="IBM Plex Mono"/>
+              </a:rPr>
+              <a:t>PROJECT PLAN</a:t>
+            </a:r>
+          </a:p>
+        </p:txBody>
+      </p:sp>
+      <p:sp>
+        <p:nvSpPr>
+          <p:cNvPr id="3" name="Rectangle 2"/>
+          <p:cNvSpPr/>
+          <p:nvPr/>
+        </p:nvSpPr>
+        <p:spPr>
+          <a:xfrm>
+            <a:off x="640080" y="384048"/>
+            <a:ext cx="384048" cy="256032"/>
+          </a:xfrm>
+          <a:prstGeom prst="rect">
+            <a:avLst/>
+          </a:prstGeom>
+          <a:solidFill>
+            <a:srgbClr val="1F5E56"/>
+          </a:solidFill>
+          <a:ln>
+            <a:noFill/>
+          </a:ln>
+        </p:spPr>
+        <p:style>
+          <a:lnRef idx="1">
+            <a:schemeClr val="accent1"/>
+          </a:lnRef>
+          <a:fillRef idx="3">
+            <a:schemeClr val="accent1"/>
+          </a:fillRef>
+          <a:effectRef idx="2">
+            <a:schemeClr val="accent1"/>
+          </a:effectRef>
+          <a:fontRef idx="minor">
+            <a:schemeClr val="lt1"/>
+          </a:fontRef>
+        </p:style>
+        <p:txBody>
+          <a:bodyPr rtlCol="0" anchor="ctr" lIns="0" rIns="0" tIns="0"/>
+          <a:lstStyle/>
+          <a:p>
+            <a:pPr algn="ctr"/>
+            <a:r>
+              <a:rPr sz="1000" b="1" i="0">
+                <a:solidFill>
+                  <a:srgbClr val="ECEFE2"/>
+                </a:solidFill>
+                <a:latin typeface="IBM Plex Mono"/>
+              </a:rPr>
+              <a:t>15</a:t>
+            </a:r>
+          </a:p>
+        </p:txBody>
+      </p:sp>
+      <p:sp>
+        <p:nvSpPr>
+          <p:cNvPr id="4" name="TextBox 3"/>
+          <p:cNvSpPr txBox="1"/>
+          <p:nvPr/>
+        </p:nvSpPr>
+        <p:spPr>
+          <a:xfrm>
+            <a:off x="640080" y="777240"/>
+            <a:ext cx="9601200" cy="1463040"/>
+          </a:xfrm>
+          <a:prstGeom prst="rect">
+            <a:avLst/>
+          </a:prstGeom>
+          <a:noFill/>
+        </p:spPr>
+        <p:txBody>
+          <a:bodyPr wrap="square" anchor="t">
+            <a:spAutoFit/>
+          </a:bodyPr>
+          <a:lstStyle/>
+          <a:p>
+            <a:pPr algn="l"/>
+            <a:r>
+              <a:rPr sz="2800" b="1" i="0">
+                <a:solidFill>
+                  <a:srgbClr val="1B2A2E"/>
+                </a:solidFill>
+                <a:latin typeface="IBM Plex Sans"/>
+              </a:rPr>
+              <a:t>What ships when — priority follows the customer, not the demo.</a:t>
+            </a:r>
+          </a:p>
+        </p:txBody>
+      </p:sp>
+      <p:sp>
+        <p:nvSpPr>
+          <p:cNvPr id="5" name="TextBox 4"/>
+          <p:cNvSpPr txBox="1"/>
+          <p:nvPr/>
+        </p:nvSpPr>
+        <p:spPr>
+          <a:xfrm>
+            <a:off x="640080" y="1691640"/>
+            <a:ext cx="10515600" cy="822960"/>
+          </a:xfrm>
+          <a:prstGeom prst="rect">
+            <a:avLst/>
+          </a:prstGeom>
+          <a:noFill/>
+        </p:spPr>
+        <p:txBody>
+          <a:bodyPr wrap="square" anchor="t">
+            <a:spAutoFit/>
+          </a:bodyPr>
+          <a:lstStyle/>
+          <a:p>
+            <a:pPr algn="l"/>
+            <a:r>
+              <a:rPr sz="1450" b="0" i="0">
+                <a:solidFill>
+                  <a:srgbClr val="1B2A2E"/>
+                </a:solidFill>
+                <a:latin typeface="IBM Plex Sans"/>
+              </a:rPr>
+              <a:t>Scoped as a MoSCoW backlog. The order isn't about what's technically impressive — it's about what the landlord from slide 04 (small portfolio, side income, low tech-sophistication) actually needs first.</a:t>
+            </a:r>
+          </a:p>
+        </p:txBody>
+      </p:sp>
+      <p:graphicFrame>
+        <p:nvGraphicFramePr>
+          <p:cNvPr id="6" name="Table 5"/>
+          <p:cNvGraphicFramePr>
+            <a:graphicFrameLocks noGrp="1"/>
+          </p:cNvGraphicFramePr>
+          <p:nvPr/>
+        </p:nvGraphicFramePr>
+        <p:xfrm>
+          <a:off x="640080" y="2743200"/>
+          <a:ext cx="10515600" cy="2743200"/>
+        </p:xfrm>
+        <a:graphic>
+          <a:graphicData uri="http://schemas.openxmlformats.org/drawingml/2006/table">
+            <a:tbl>
+              <a:tblPr firstRow="1" bandRow="1">
+                <a:tableStyleId>{5C22544A-7EE6-4342-B048-85BDC9FD1C3A}</a:tableStyleId>
+              </a:tblPr>
+              <a:tblGrid>
+                <a:gridCol w="1463040"/>
+                <a:gridCol w="3108960"/>
+                <a:gridCol w="5943600"/>
+              </a:tblGrid>
+              <a:tr h="457200">
+                <a:tc>
+                  <a:txBody>
+                    <a:bodyPr/>
+                    <a:lstStyle/>
+                    <a:p>
+                      <a:r>
+                        <a:rPr sz="1100" b="1">
+                          <a:solidFill>
+                            <a:srgbClr val="5B665F"/>
+                          </a:solidFill>
+                          <a:latin typeface="IBM Plex Mono"/>
+                        </a:rPr>
+                        <a:t>Priority</a:t>
+                      </a:r>
+                    </a:p>
+                  </a:txBody>
+                  <a:tcPr>
+                    <a:solidFill>
+                      <a:srgbClr val="F5F6EC"/>
+                    </a:solidFill>
+                  </a:tcPr>
+                </a:tc>
+                <a:tc>
+                  <a:txBody>
+                    <a:bodyPr/>
+                    <a:lstStyle/>
+                    <a:p>
+                      <a:r>
+                        <a:rPr sz="1100" b="1">
+                          <a:solidFill>
+                            <a:srgbClr val="5B665F"/>
+                          </a:solidFill>
+                          <a:latin typeface="IBM Plex Mono"/>
+                        </a:rPr>
+                        <a:t>Feature</a:t>
+                      </a:r>
+                    </a:p>
+                  </a:txBody>
+                  <a:tcPr>
+                    <a:solidFill>
+                      <a:srgbClr val="F5F6EC"/>
+                    </a:solidFill>
+                  </a:tcPr>
+                </a:tc>
+                <a:tc>
+                  <a:txBody>
+                    <a:bodyPr/>
+                    <a:lstStyle/>
+                    <a:p>
+                      <a:r>
+                        <a:rPr sz="1100" b="1">
+                          <a:solidFill>
+                            <a:srgbClr val="5B665F"/>
+                          </a:solidFill>
+                          <a:latin typeface="IBM Plex Mono"/>
+                        </a:rPr>
+                        <a:t>Status</a:t>
+                      </a:r>
+                    </a:p>
+                  </a:txBody>
+                  <a:tcPr>
+                    <a:solidFill>
+                      <a:srgbClr val="F5F6EC"/>
+                    </a:solidFill>
+                  </a:tcPr>
+                </a:tc>
+              </a:tr>
+              <a:tr h="457200">
+                <a:tc>
+                  <a:txBody>
+                    <a:bodyPr/>
+                    <a:lstStyle/>
+                    <a:p>
+                      <a:r>
+                        <a:rPr sz="1300">
+                          <a:solidFill>
+                            <a:srgbClr val="1B2A2E"/>
+                          </a:solidFill>
+                          <a:latin typeface="IBM Plex Mono"/>
+                        </a:rPr>
+                        <a:t>Must have</a:t>
+                      </a:r>
+                    </a:p>
+                  </a:txBody>
+                  <a:tcPr>
+                    <a:solidFill>
+                      <a:srgbClr val="ECEFE2"/>
+                    </a:solidFill>
+                  </a:tcPr>
+                </a:tc>
+                <a:tc>
+                  <a:txBody>
+                    <a:bodyPr/>
+                    <a:lstStyle/>
+                    <a:p>
+                      <a:r>
+                        <a:rPr sz="1300">
+                          <a:solidFill>
+                            <a:srgbClr val="1B2A2E"/>
+                          </a:solidFill>
+                          <a:latin typeface="IBM Plex Mono"/>
+                        </a:rPr>
+                        <a:t>Manage the costs &amp; profits</a:t>
+                      </a:r>
+                    </a:p>
+                  </a:txBody>
+                  <a:tcPr>
+                    <a:solidFill>
+                      <a:srgbClr val="ECEFE2"/>
+                    </a:solidFill>
+                  </a:tcPr>
+                </a:tc>
+                <a:tc>
+                  <a:txBody>
+                    <a:bodyPr/>
+                    <a:lstStyle/>
+                    <a:p>
+                      <a:r>
+                        <a:rPr sz="1300">
+                          <a:solidFill>
+                            <a:srgbClr val="1B2A2E"/>
+                          </a:solidFill>
+                          <a:latin typeface="IBM Plex Mono"/>
+                        </a:rPr>
+                        <a:t>Built - Round 1 core (extraction + dashboard); Round 2 hardens to production</a:t>
+                      </a:r>
+                    </a:p>
+                  </a:txBody>
+                  <a:tcPr>
+                    <a:solidFill>
+                      <a:srgbClr val="ECEFE2"/>
+                    </a:solidFill>
+                  </a:tcPr>
+                </a:tc>
+              </a:tr>
+              <a:tr h="457200">
+                <a:tc>
+                  <a:txBody>
+                    <a:bodyPr/>
+                    <a:lstStyle/>
+                    <a:p>
+                      <a:r>
+                        <a:rPr sz="1300">
+                          <a:solidFill>
+                            <a:srgbClr val="1B2A2E"/>
+                          </a:solidFill>
+                          <a:latin typeface="IBM Plex Mono"/>
+                        </a:rPr>
+                        <a:t>Should have</a:t>
+                      </a:r>
+                    </a:p>
+                  </a:txBody>
+                  <a:tcPr>
+                    <a:solidFill>
+                      <a:srgbClr val="ECEFE2"/>
+                    </a:solidFill>
+                  </a:tcPr>
+                </a:tc>
+                <a:tc>
+                  <a:txBody>
+                    <a:bodyPr/>
+                    <a:lstStyle/>
+                    <a:p>
+                      <a:r>
+                        <a:rPr sz="1300">
+                          <a:solidFill>
+                            <a:srgbClr val="1B2A2E"/>
+                          </a:solidFill>
+                          <a:latin typeface="IBM Plex Mono"/>
+                        </a:rPr>
+                        <a:t>Tax savings advisor bot</a:t>
+                      </a:r>
+                    </a:p>
+                  </a:txBody>
+                  <a:tcPr>
+                    <a:solidFill>
+                      <a:srgbClr val="ECEFE2"/>
+                    </a:solidFill>
+                  </a:tcPr>
+                </a:tc>
+                <a:tc>
+                  <a:txBody>
+                    <a:bodyPr/>
+                    <a:lstStyle/>
+                    <a:p>
+                      <a:r>
+                        <a:rPr sz="1300">
+                          <a:solidFill>
+                            <a:srgbClr val="1B2A2E"/>
+                          </a:solidFill>
+                          <a:latin typeface="IBM Plex Mono"/>
+                        </a:rPr>
+                        <a:t>New - Round 2/3 candidate</a:t>
+                      </a:r>
+                    </a:p>
+                  </a:txBody>
+                  <a:tcPr>
+                    <a:solidFill>
+                      <a:srgbClr val="ECEFE2"/>
+                    </a:solidFill>
+                  </a:tcPr>
+                </a:tc>
+              </a:tr>
+              <a:tr h="457200">
+                <a:tc>
+                  <a:txBody>
+                    <a:bodyPr/>
+                    <a:lstStyle/>
+                    <a:p>
+                      <a:r>
+                        <a:rPr sz="1300">
+                          <a:solidFill>
+                            <a:srgbClr val="1B2A2E"/>
+                          </a:solidFill>
+                          <a:latin typeface="IBM Plex Mono"/>
+                        </a:rPr>
+                        <a:t>Could have</a:t>
+                      </a:r>
+                    </a:p>
+                  </a:txBody>
+                  <a:tcPr>
+                    <a:solidFill>
+                      <a:srgbClr val="ECEFE2"/>
+                    </a:solidFill>
+                  </a:tcPr>
+                </a:tc>
+                <a:tc>
+                  <a:txBody>
+                    <a:bodyPr/>
+                    <a:lstStyle/>
+                    <a:p>
+                      <a:r>
+                        <a:rPr sz="1300">
+                          <a:solidFill>
+                            <a:srgbClr val="1B2A2E"/>
+                          </a:solidFill>
+                          <a:latin typeface="IBM Plex Mono"/>
+                        </a:rPr>
+                        <a:t>Automated rental contract generation</a:t>
+                      </a:r>
+                    </a:p>
+                  </a:txBody>
+                  <a:tcPr>
+                    <a:solidFill>
+                      <a:srgbClr val="ECEFE2"/>
+                    </a:solidFill>
+                  </a:tcPr>
+                </a:tc>
+                <a:tc>
+                  <a:txBody>
+                    <a:bodyPr/>
+                    <a:lstStyle/>
+                    <a:p>
+                      <a:r>
+                        <a:rPr sz="1300">
+                          <a:solidFill>
+                            <a:srgbClr val="1B2A2E"/>
+                          </a:solidFill>
+                          <a:latin typeface="IBM Plex Mono"/>
+                        </a:rPr>
+                        <a:t>Adjacent to lease-extraction already built - inverse direction</a:t>
+                      </a:r>
+                    </a:p>
+                  </a:txBody>
+                  <a:tcPr>
+                    <a:solidFill>
+                      <a:srgbClr val="ECEFE2"/>
+                    </a:solidFill>
+                  </a:tcPr>
+                </a:tc>
+              </a:tr>
+              <a:tr h="457200">
+                <a:tc>
+                  <a:txBody>
+                    <a:bodyPr/>
+                    <a:lstStyle/>
+                    <a:p>
+                      <a:r>
+                        <a:rPr sz="1300">
+                          <a:solidFill>
+                            <a:srgbClr val="1B2A2E"/>
+                          </a:solidFill>
+                          <a:latin typeface="IBM Plex Mono"/>
+                        </a:rPr>
+                        <a:t>Could have</a:t>
+                      </a:r>
+                    </a:p>
+                  </a:txBody>
+                  <a:tcPr>
+                    <a:solidFill>
+                      <a:srgbClr val="ECEFE2"/>
+                    </a:solidFill>
+                  </a:tcPr>
+                </a:tc>
+                <a:tc>
+                  <a:txBody>
+                    <a:bodyPr/>
+                    <a:lstStyle/>
+                    <a:p>
+                      <a:r>
+                        <a:rPr sz="1300">
+                          <a:solidFill>
+                            <a:srgbClr val="1B2A2E"/>
+                          </a:solidFill>
+                          <a:latin typeface="IBM Plex Mono"/>
+                        </a:rPr>
+                        <a:t>Tenant complaints management</a:t>
+                      </a:r>
+                    </a:p>
+                  </a:txBody>
+                  <a:tcPr>
+                    <a:solidFill>
+                      <a:srgbClr val="ECEFE2"/>
+                    </a:solidFill>
+                  </a:tcPr>
+                </a:tc>
+                <a:tc>
+                  <a:txBody>
+                    <a:bodyPr/>
+                    <a:lstStyle/>
+                    <a:p>
+                      <a:r>
+                        <a:rPr sz="1300">
+                          <a:solidFill>
+                            <a:srgbClr val="1B2A2E"/>
+                          </a:solidFill>
+                          <a:latin typeface="IBM Plex Mono"/>
+                        </a:rPr>
+                        <a:t>Adjacent to maintenance-request tracking already prototyped</a:t>
+                      </a:r>
+                    </a:p>
+                  </a:txBody>
+                  <a:tcPr>
+                    <a:solidFill>
+                      <a:srgbClr val="ECEFE2"/>
+                    </a:solidFill>
+                  </a:tcPr>
+                </a:tc>
+              </a:tr>
+              <a:tr h="457200">
+                <a:tc>
+                  <a:txBody>
+                    <a:bodyPr/>
+                    <a:lstStyle/>
+                    <a:p>
+                      <a:r>
+                        <a:rPr sz="1300">
+                          <a:solidFill>
+                            <a:srgbClr val="1B2A2E"/>
+                          </a:solidFill>
+                          <a:latin typeface="IBM Plex Mono"/>
+                        </a:rPr>
+                        <a:t>Nice to have</a:t>
+                      </a:r>
+                    </a:p>
+                  </a:txBody>
+                  <a:tcPr>
+                    <a:solidFill>
+                      <a:srgbClr val="ECEFE2"/>
+                    </a:solidFill>
+                  </a:tcPr>
+                </a:tc>
+                <a:tc>
+                  <a:txBody>
+                    <a:bodyPr/>
+                    <a:lstStyle/>
+                    <a:p>
+                      <a:r>
+                        <a:rPr sz="1300">
+                          <a:solidFill>
+                            <a:srgbClr val="1B2A2E"/>
+                          </a:solidFill>
+                          <a:latin typeface="IBM Plex Mono"/>
+                        </a:rPr>
+                        <a:t>Direct bank connections (rent verification, tenant reminders, auto statement pull)</a:t>
+                      </a:r>
+                    </a:p>
+                  </a:txBody>
+                  <a:tcPr>
+                    <a:solidFill>
+                      <a:srgbClr val="ECEFE2"/>
+                    </a:solidFill>
+                  </a:tcPr>
+                </a:tc>
+                <a:tc>
+                  <a:txBody>
+                    <a:bodyPr/>
+                    <a:lstStyle/>
+                    <a:p>
+                      <a:r>
+                        <a:rPr sz="1300">
+                          <a:solidFill>
+                            <a:srgbClr val="1B2A2E"/>
+                          </a:solidFill>
+                          <a:latin typeface="IBM Plex Mono"/>
+                        </a:rPr>
+                        <a:t>Already demoed end to end (Enable Banking Mock ASPSP) - lowest priority, most de-risked</a:t>
+                      </a:r>
+                    </a:p>
+                  </a:txBody>
+                  <a:tcPr>
+                    <a:solidFill>
+                      <a:srgbClr val="ECEFE2"/>
+                    </a:solidFill>
+                  </a:tcPr>
+                </a:tc>
+              </a:tr>
+            </a:tbl>
+          </a:graphicData>
+        </a:graphic>
+      </p:graphicFrame>
+      <p:sp>
+        <p:nvSpPr>
+          <p:cNvPr id="7" name="TextBox 6"/>
+          <p:cNvSpPr txBox="1"/>
+          <p:nvPr/>
+        </p:nvSpPr>
+        <p:spPr>
+          <a:xfrm>
+            <a:off x="640080" y="5623560"/>
+            <a:ext cx="10515600" cy="914400"/>
+          </a:xfrm>
+          <a:prstGeom prst="rect">
+            <a:avLst/>
+          </a:prstGeom>
+          <a:noFill/>
+        </p:spPr>
+        <p:txBody>
+          <a:bodyPr wrap="square" anchor="t">
+            <a:spAutoFit/>
+          </a:bodyPr>
+          <a:lstStyle/>
+          <a:p>
+            <a:pPr algn="l"/>
+            <a:r>
+              <a:rPr sz="1300" b="0" i="1">
+                <a:solidFill>
+                  <a:srgbClr val="1B2A2E"/>
+                </a:solidFill>
+                <a:latin typeface="IBM Plex Sans"/>
+              </a:rPr>
+              <a:t>That last row is deliberate: technical readiness and customer priority aren't the same axis. Bank connections are the furthest along technically and the lowest priority for this customer - proof the roadmap follows the persona (slide 04), not the excitement of what got built.</a:t>
+            </a:r>
+          </a:p>
+        </p:txBody>
+      </p:sp>
+      <p:sp>
+        <p:nvSpPr>
+          <p:cNvPr id="8" name="TextBox 7"/>
+          <p:cNvSpPr txBox="1"/>
+          <p:nvPr/>
+        </p:nvSpPr>
+        <p:spPr>
+          <a:xfrm>
+            <a:off x="640080" y="6492240"/>
+            <a:ext cx="3657600" cy="274320"/>
+          </a:xfrm>
+          <a:prstGeom prst="rect">
+            <a:avLst/>
+          </a:prstGeom>
+          <a:noFill/>
+        </p:spPr>
+        <p:txBody>
+          <a:bodyPr wrap="square" anchor="t">
+            <a:spAutoFit/>
+          </a:bodyPr>
+          <a:lstStyle/>
+          <a:p>
+            <a:pPr algn="l"/>
+            <a:r>
+              <a:rPr sz="950" b="0" i="0">
+                <a:solidFill>
+                  <a:srgbClr val="5B665F"/>
+                </a:solidFill>
+                <a:latin typeface="IBM Plex Mono"/>
+              </a:rPr>
+              <a:t>Property Ledger</a:t>
+            </a:r>
+          </a:p>
+        </p:txBody>
+      </p:sp>
+      <p:sp>
+        <p:nvSpPr>
+          <p:cNvPr id="9" name="TextBox 8"/>
+          <p:cNvSpPr txBox="1"/>
+          <p:nvPr/>
+        </p:nvSpPr>
+        <p:spPr>
+          <a:xfrm>
+            <a:off x="10789920" y="6492240"/>
+            <a:ext cx="914400" cy="274320"/>
+          </a:xfrm>
+          <a:prstGeom prst="rect">
+            <a:avLst/>
+          </a:prstGeom>
+          <a:noFill/>
+        </p:spPr>
+        <p:txBody>
+          <a:bodyPr wrap="square" anchor="t">
+            <a:spAutoFit/>
+          </a:bodyPr>
+          <a:lstStyle/>
+          <a:p>
+            <a:pPr algn="r"/>
+            <a:r>
+              <a:rPr sz="950" b="0" i="0">
+                <a:solidFill>
+                  <a:srgbClr val="5B665F"/>
+                </a:solidFill>
+                <a:latin typeface="IBM Plex Mono"/>
+              </a:rPr>
+              <a:t>15 / 15</a:t>
             </a:r>
           </a:p>
         </p:txBody>
@@ -6434,7 +7157,7 @@
                 </a:solidFill>
                 <a:latin typeface="IBM Plex Mono"/>
               </a:rPr>
-              <a:t>02 / 14</a:t>
+              <a:t>02 / 15</a:t>
             </a:r>
           </a:p>
         </p:txBody>
@@ -7026,7 +7749,7 @@
                 </a:solidFill>
                 <a:latin typeface="IBM Plex Mono"/>
               </a:rPr>
-              <a:t>03 / 14</a:t>
+              <a:t>03 / 15</a:t>
             </a:r>
           </a:p>
         </p:txBody>
@@ -7483,7 +8206,7 @@
                 </a:solidFill>
                 <a:latin typeface="IBM Plex Mono"/>
               </a:rPr>
-              <a:t>04 / 14</a:t>
+              <a:t>04 / 15</a:t>
             </a:r>
           </a:p>
         </p:txBody>
@@ -8075,7 +8798,7 @@
                 </a:solidFill>
                 <a:latin typeface="IBM Plex Mono"/>
               </a:rPr>
-              <a:t>05 / 14</a:t>
+              <a:t>05 / 15</a:t>
             </a:r>
           </a:p>
         </p:txBody>
@@ -8654,7 +9377,7 @@
                 </a:solidFill>
                 <a:latin typeface="IBM Plex Mono"/>
               </a:rPr>
-              <a:t>06 / 14</a:t>
+              <a:t>06 / 15</a:t>
             </a:r>
           </a:p>
         </p:txBody>
@@ -9453,7 +10176,7 @@
                 </a:solidFill>
                 <a:latin typeface="IBM Plex Mono"/>
               </a:rPr>
-              <a:t>07 / 14</a:t>
+              <a:t>07 / 15</a:t>
             </a:r>
           </a:p>
         </p:txBody>
@@ -10031,7 +10754,7 @@
                 </a:solidFill>
                 <a:latin typeface="IBM Plex Mono"/>
               </a:rPr>
-              <a:t>08 / 14</a:t>
+              <a:t>08 / 15</a:t>
             </a:r>
           </a:p>
         </p:txBody>
@@ -10688,7 +11411,7 @@
                 </a:solidFill>
                 <a:latin typeface="IBM Plex Mono"/>
               </a:rPr>
-              <a:t>09 / 14</a:t>
+              <a:t>09 / 15</a:t>
             </a:r>
           </a:p>
         </p:txBody>
